--- a/courses/Micro-And-Macro-Economics/projects/AI-GitHub-Project.pptx
+++ b/courses/Micro-And-Macro-Economics/projects/AI-GitHub-Project.pptx
@@ -8140,7 +8140,7 @@
                 </a:solidFill>
                 <a:latin typeface="Open Sans"/>
               </a:rPr>
-              <a:t>Use your hawaii.edu address — it unlocks GitHub Education.</a:t>
+              <a:t>Any email works. GitHub Education benefits are optional and never graded.</a:t>
             </a:r>
           </a:p>
         </p:txBody>
